--- a/Forecast_Sandbox__Regime_Aware_Model_Selection.pptx
+++ b/Forecast_Sandbox__Regime_Aware_Model_Selection.pptx
@@ -438,7 +438,7 @@
           <a:p>
             <a:fld id="{5BCAD085-E8A6-8845-BD4E-CB4CCA059FC4}" type="datetimeFigureOut">
               <a:rPr lang="en-US" smtClean="0"/>
-              <a:t>12/12/2025</a:t>
+              <a:t>7/12/2026</a:t>
             </a:fld>
             <a:endParaRPr lang="en-US"/>
           </a:p>
@@ -639,7 +639,7 @@
           <a:p>
             <a:fld id="{5BCAD085-E8A6-8845-BD4E-CB4CCA059FC4}" type="datetimeFigureOut">
               <a:rPr lang="en-US" smtClean="0"/>
-              <a:t>12/12/2025</a:t>
+              <a:t>7/12/2026</a:t>
             </a:fld>
             <a:endParaRPr lang="en-US"/>
           </a:p>
@@ -850,7 +850,7 @@
           <a:p>
             <a:fld id="{5BCAD085-E8A6-8845-BD4E-CB4CCA059FC4}" type="datetimeFigureOut">
               <a:rPr lang="en-US" smtClean="0"/>
-              <a:t>12/12/2025</a:t>
+              <a:t>7/12/2026</a:t>
             </a:fld>
             <a:endParaRPr lang="en-US"/>
           </a:p>
@@ -4276,7 +4276,7 @@
           <a:p>
             <a:fld id="{5BCAD085-E8A6-8845-BD4E-CB4CCA059FC4}" type="datetimeFigureOut">
               <a:rPr lang="en-US" smtClean="0"/>
-              <a:t>12/12/2025</a:t>
+              <a:t>7/12/2026</a:t>
             </a:fld>
             <a:endParaRPr lang="en-US"/>
           </a:p>
@@ -9827,7 +9827,7 @@
           <a:p>
             <a:fld id="{5BCAD085-E8A6-8845-BD4E-CB4CCA059FC4}" type="datetimeFigureOut">
               <a:rPr lang="en-US" smtClean="0"/>
-              <a:t>12/12/2025</a:t>
+              <a:t>7/12/2026</a:t>
             </a:fld>
             <a:endParaRPr lang="en-US"/>
           </a:p>
@@ -13587,7 +13587,7 @@
           <a:p>
             <a:fld id="{5BCAD085-E8A6-8845-BD4E-CB4CCA059FC4}" type="datetimeFigureOut">
               <a:rPr lang="en-US" smtClean="0"/>
-              <a:t>12/12/2025</a:t>
+              <a:t>7/12/2026</a:t>
             </a:fld>
             <a:endParaRPr lang="en-US"/>
           </a:p>
@@ -17161,7 +17161,7 @@
           <a:p>
             <a:fld id="{5BCAD085-E8A6-8845-BD4E-CB4CCA059FC4}" type="datetimeFigureOut">
               <a:rPr lang="en-US" smtClean="0"/>
-              <a:t>12/12/2025</a:t>
+              <a:t>7/12/2026</a:t>
             </a:fld>
             <a:endParaRPr lang="en-US"/>
           </a:p>
@@ -20558,7 +20558,7 @@
           <a:p>
             <a:fld id="{5BCAD085-E8A6-8845-BD4E-CB4CCA059FC4}" type="datetimeFigureOut">
               <a:rPr lang="en-US" smtClean="0"/>
-              <a:t>12/12/2025</a:t>
+              <a:t>7/12/2026</a:t>
             </a:fld>
             <a:endParaRPr lang="en-US"/>
           </a:p>
@@ -23085,7 +23085,7 @@
           <a:p>
             <a:fld id="{5BCAD085-E8A6-8845-BD4E-CB4CCA059FC4}" type="datetimeFigureOut">
               <a:rPr lang="en-US" smtClean="0"/>
-              <a:t>12/12/2025</a:t>
+              <a:t>7/12/2026</a:t>
             </a:fld>
             <a:endParaRPr lang="en-US"/>
           </a:p>
@@ -25991,7 +25991,7 @@
           <a:p>
             <a:fld id="{5BCAD085-E8A6-8845-BD4E-CB4CCA059FC4}" type="datetimeFigureOut">
               <a:rPr lang="en-US" smtClean="0"/>
-              <a:t>12/12/2025</a:t>
+              <a:t>7/12/2026</a:t>
             </a:fld>
             <a:endParaRPr lang="en-US"/>
           </a:p>
@@ -28970,7 +28970,7 @@
           <a:p>
             <a:fld id="{5BCAD085-E8A6-8845-BD4E-CB4CCA059FC4}" type="datetimeFigureOut">
               <a:rPr lang="en-US" smtClean="0"/>
-              <a:t>12/12/2025</a:t>
+              <a:t>7/12/2026</a:t>
             </a:fld>
             <a:endParaRPr lang="en-US"/>
           </a:p>
@@ -29214,7 +29214,7 @@
           <a:p>
             <a:fld id="{5BCAD085-E8A6-8845-BD4E-CB4CCA059FC4}" type="datetimeFigureOut">
               <a:rPr lang="en-US" smtClean="0"/>
-              <a:t>12/12/2025</a:t>
+              <a:t>7/12/2026</a:t>
             </a:fld>
             <a:endParaRPr lang="en-US"/>
           </a:p>
@@ -31774,7 +31774,7 @@
           <a:p>
             <a:r>
               <a:rPr lang="en-GB" dirty="0"/>
-              <a:t>Chronos2 Acts as a Structure-Agnostic Baseline</a:t>
+              <a:t>SES Optimized Acts as a Structure-Agnostic Baseline</a:t>
             </a:r>
             <a:endParaRPr lang="en-US" sz="3200" b="0" dirty="0">
               <a:latin typeface="+mn-lt"/>
@@ -31799,6 +31799,10 @@
           </p:nvPr>
         </p:nvSpPr>
         <p:spPr bwMode="auto">
+          <a:xfrm>
+            <a:off x="5185201" y="682095"/>
+            <a:ext cx="6383307" cy="5493812"/>
+          </a:xfrm>
           <a:prstGeom prst="rect">
             <a:avLst/>
           </a:prstGeom>
@@ -31893,7 +31897,7 @@
               <a:rPr lang="en-GB" altLang="en-US" sz="1800" dirty="0">
                 <a:latin typeface="Arial" panose="020B0604020202020204" pitchFamily="34" charset="0"/>
               </a:rPr>
-              <a:t> Chronos2 ranks within the top score band at portfolio level</a:t>
+              <a:t> SES Optimised is recommended as the default baseline model.</a:t>
             </a:r>
           </a:p>
           <a:p>
@@ -31924,7 +31928,7 @@
                 <a:effectLst/>
                 <a:latin typeface="Arial" panose="020B0604020202020204" pitchFamily="34" charset="0"/>
               </a:rPr>
-              <a:t> Appears as a best model across multiple demand structures</a:t>
+              <a:t> It delivers better overall performance than Chronos2, particularly in the tail of the error distribution.</a:t>
             </a:r>
           </a:p>
           <a:p>
@@ -31954,7 +31958,44 @@
               <a:rPr lang="en-GB" altLang="en-US" sz="1800" dirty="0">
                 <a:latin typeface="Arial" panose="020B0604020202020204" pitchFamily="34" charset="0"/>
               </a:rPr>
-              <a:t>Does not produce the largest observed error spikes</a:t>
+              <a:t>Chronos2 remains a strong, structure-agnostic benchmark and performs consistently across multiple demand structures.</a:t>
+            </a:r>
+          </a:p>
+          <a:p>
+            <a:pPr marL="0" marR="0" lvl="0" indent="0" algn="l" defTabSz="914400" rtl="0" eaLnBrk="0" fontAlgn="base" latinLnBrk="0" hangingPunct="0">
+              <a:lnSpc>
+                <a:spcPct val="150000"/>
+              </a:lnSpc>
+              <a:spcBef>
+                <a:spcPct val="0"/>
+              </a:spcBef>
+              <a:spcAft>
+                <a:spcPct val="0"/>
+              </a:spcAft>
+              <a:buClrTx/>
+              <a:buSzTx/>
+              <a:buFontTx/>
+              <a:buChar char="•"/>
+              <a:tabLst/>
+            </a:pPr>
+            <a:r>
+              <a:rPr lang="en-GB" altLang="en-US" sz="1800" dirty="0">
+                <a:latin typeface="Arial" panose="020B0604020202020204" pitchFamily="34" charset="0"/>
+              </a:rPr>
+              <a:t> </a:t>
+            </a:r>
+            <a:r>
+              <a:rPr kumimoji="0" lang="en-GB" altLang="en-US" sz="1800" b="0" i="0" u="none" strike="noStrike" cap="none" normalizeH="0" baseline="0" dirty="0">
+                <a:ln>
+                  <a:noFill/>
+                </a:ln>
+                <a:solidFill>
+                  <a:schemeClr val="tx1"/>
+                </a:solidFill>
+                <a:effectLst/>
+                <a:latin typeface="Arial" panose="020B0604020202020204" pitchFamily="34" charset="0"/>
+              </a:rPr>
+              <a:t>However, its higher tail error makes it less robust than SES Optimised.</a:t>
             </a:r>
           </a:p>
           <a:p>
@@ -32067,7 +32108,7 @@
                 <a:effectLst/>
                 <a:latin typeface="Arial" panose="020B0604020202020204" pitchFamily="34" charset="0"/>
               </a:rPr>
-              <a:t>Chronos2 behaves as a structure-agnostic baseline rather than a specialist.</a:t>
+              <a:t>Use SES Optimised as the primary baseline and retain Chronos2 as a secondary benchmark for comparison.</a:t>
             </a:r>
             <a:endParaRPr kumimoji="0" lang="en-US" altLang="en-US" sz="1800" b="0" i="0" u="none" strike="noStrike" cap="none" normalizeH="0" baseline="0" dirty="0">
               <a:ln>
